--- a/SimLens_Proposal_2026-05-04_ZH.pptx
+++ b/SimLens_Proposal_2026-05-04_ZH.pptx
@@ -225,7 +225,7 @@
           <a:p>
             <a:fld id="{198D0856-6424-4B7D-A136-7F4DC3CEC865}" type="datetimeFigureOut">
               <a:rPr lang="zh-TW" altLang="en-US" smtClean="0"/>
-              <a:t>2026/5/5</a:t>
+              <a:t>2026/5/6</a:t>
             </a:fld>
             <a:endParaRPr lang="zh-TW" altLang="en-US"/>
           </a:p>
@@ -671,7 +671,7 @@
           <a:p>
             <a:fld id="{5BCAD085-E8A6-8845-BD4E-CB4CCA059FC4}" type="datetimeFigureOut">
               <a:rPr lang="en-US" smtClean="0"/>
-              <a:t>5/5/2026</a:t>
+              <a:t>5/6/2026</a:t>
             </a:fld>
             <a:endParaRPr lang="en-US"/>
           </a:p>
@@ -839,7 +839,7 @@
           <a:p>
             <a:fld id="{5BCAD085-E8A6-8845-BD4E-CB4CCA059FC4}" type="datetimeFigureOut">
               <a:rPr lang="en-US" smtClean="0"/>
-              <a:t>5/5/2026</a:t>
+              <a:t>5/6/2026</a:t>
             </a:fld>
             <a:endParaRPr lang="en-US"/>
           </a:p>
@@ -1017,7 +1017,7 @@
           <a:p>
             <a:fld id="{5BCAD085-E8A6-8845-BD4E-CB4CCA059FC4}" type="datetimeFigureOut">
               <a:rPr lang="en-US" smtClean="0"/>
-              <a:t>5/5/2026</a:t>
+              <a:t>5/6/2026</a:t>
             </a:fld>
             <a:endParaRPr lang="en-US"/>
           </a:p>
@@ -1185,7 +1185,7 @@
           <a:p>
             <a:fld id="{5BCAD085-E8A6-8845-BD4E-CB4CCA059FC4}" type="datetimeFigureOut">
               <a:rPr lang="en-US" smtClean="0"/>
-              <a:t>5/5/2026</a:t>
+              <a:t>5/6/2026</a:t>
             </a:fld>
             <a:endParaRPr lang="en-US"/>
           </a:p>
@@ -1430,7 +1430,7 @@
           <a:p>
             <a:fld id="{5BCAD085-E8A6-8845-BD4E-CB4CCA059FC4}" type="datetimeFigureOut">
               <a:rPr lang="en-US" smtClean="0"/>
-              <a:t>5/5/2026</a:t>
+              <a:t>5/6/2026</a:t>
             </a:fld>
             <a:endParaRPr lang="en-US"/>
           </a:p>
@@ -1715,7 +1715,7 @@
           <a:p>
             <a:fld id="{5BCAD085-E8A6-8845-BD4E-CB4CCA059FC4}" type="datetimeFigureOut">
               <a:rPr lang="en-US" smtClean="0"/>
-              <a:t>5/5/2026</a:t>
+              <a:t>5/6/2026</a:t>
             </a:fld>
             <a:endParaRPr lang="en-US"/>
           </a:p>
@@ -2134,7 +2134,7 @@
           <a:p>
             <a:fld id="{5BCAD085-E8A6-8845-BD4E-CB4CCA059FC4}" type="datetimeFigureOut">
               <a:rPr lang="en-US" smtClean="0"/>
-              <a:t>5/5/2026</a:t>
+              <a:t>5/6/2026</a:t>
             </a:fld>
             <a:endParaRPr lang="en-US"/>
           </a:p>
@@ -2251,7 +2251,7 @@
           <a:p>
             <a:fld id="{5BCAD085-E8A6-8845-BD4E-CB4CCA059FC4}" type="datetimeFigureOut">
               <a:rPr lang="en-US" smtClean="0"/>
-              <a:t>5/5/2026</a:t>
+              <a:t>5/6/2026</a:t>
             </a:fld>
             <a:endParaRPr lang="en-US"/>
           </a:p>
@@ -2346,7 +2346,7 @@
           <a:p>
             <a:fld id="{5BCAD085-E8A6-8845-BD4E-CB4CCA059FC4}" type="datetimeFigureOut">
               <a:rPr lang="en-US" smtClean="0"/>
-              <a:t>5/5/2026</a:t>
+              <a:t>5/6/2026</a:t>
             </a:fld>
             <a:endParaRPr lang="en-US"/>
           </a:p>
@@ -2621,7 +2621,7 @@
           <a:p>
             <a:fld id="{5BCAD085-E8A6-8845-BD4E-CB4CCA059FC4}" type="datetimeFigureOut">
               <a:rPr lang="en-US" smtClean="0"/>
-              <a:t>5/5/2026</a:t>
+              <a:t>5/6/2026</a:t>
             </a:fld>
             <a:endParaRPr lang="en-US"/>
           </a:p>
@@ -2873,7 +2873,7 @@
           <a:p>
             <a:fld id="{5BCAD085-E8A6-8845-BD4E-CB4CCA059FC4}" type="datetimeFigureOut">
               <a:rPr lang="en-US" smtClean="0"/>
-              <a:t>5/5/2026</a:t>
+              <a:t>5/6/2026</a:t>
             </a:fld>
             <a:endParaRPr lang="en-US"/>
           </a:p>
@@ -3084,7 +3084,7 @@
           <a:p>
             <a:fld id="{5BCAD085-E8A6-8845-BD4E-CB4CCA059FC4}" type="datetimeFigureOut">
               <a:rPr lang="en-US" smtClean="0"/>
-              <a:t>5/5/2026</a:t>
+              <a:t>5/6/2026</a:t>
             </a:fld>
             <a:endParaRPr lang="en-US"/>
           </a:p>
@@ -6843,7 +6843,7 @@
                   <a:latin typeface="Cambria Math" panose="02040503050406030204" pitchFamily="18" charset="0"/>
                   <a:ea typeface="Cambria Math" panose="02040503050406030204" pitchFamily="18" charset="0"/>
                 </a:rPr>
-                <a:t>Claude 3.5 sonnet</a:t>
+                <a:t>Claude 4.5 sonnet</a:t>
               </a:r>
             </a:p>
           </p:txBody>
@@ -8750,8 +8750,8 @@
           </a:p>
         </p:txBody>
       </p:sp>
-      <mc:AlternateContent xmlns:mc="http://schemas.openxmlformats.org/markup-compatibility/2006">
-        <mc:Choice xmlns:a14="http://schemas.microsoft.com/office/drawing/2010/main" Requires="a14">
+      <mc:AlternateContent xmlns:mc="http://schemas.openxmlformats.org/markup-compatibility/2006" xmlns:a14="http://schemas.microsoft.com/office/drawing/2010/main">
+        <mc:Choice Requires="a14">
           <p:sp>
             <p:nvSpPr>
               <p:cNvPr id="136" name="文字方塊 135">
@@ -8909,7 +8909,7 @@
             </p:txBody>
           </p:sp>
         </mc:Choice>
-        <mc:Fallback>
+        <mc:Fallback xmlns="">
           <p:sp>
             <p:nvSpPr>
               <p:cNvPr id="136" name="文字方塊 135">
@@ -8954,8 +8954,8 @@
           </p:sp>
         </mc:Fallback>
       </mc:AlternateContent>
-      <mc:AlternateContent xmlns:mc="http://schemas.openxmlformats.org/markup-compatibility/2006">
-        <mc:Choice xmlns:a14="http://schemas.microsoft.com/office/drawing/2010/main" Requires="a14">
+      <mc:AlternateContent xmlns:mc="http://schemas.openxmlformats.org/markup-compatibility/2006" xmlns:a14="http://schemas.microsoft.com/office/drawing/2010/main">
+        <mc:Choice Requires="a14">
           <p:sp>
             <p:nvSpPr>
               <p:cNvPr id="137" name="文字方塊 136">
@@ -9099,7 +9099,7 @@
             </p:txBody>
           </p:sp>
         </mc:Choice>
-        <mc:Fallback>
+        <mc:Fallback xmlns="">
           <p:sp>
             <p:nvSpPr>
               <p:cNvPr id="137" name="文字方塊 136">
@@ -9446,8 +9446,8 @@
           </a:p>
         </p:txBody>
       </p:sp>
-      <mc:AlternateContent xmlns:mc="http://schemas.openxmlformats.org/markup-compatibility/2006">
-        <mc:Choice xmlns:a14="http://schemas.microsoft.com/office/drawing/2010/main" Requires="a14">
+      <mc:AlternateContent xmlns:mc="http://schemas.openxmlformats.org/markup-compatibility/2006" xmlns:a14="http://schemas.microsoft.com/office/drawing/2010/main">
+        <mc:Choice Requires="a14">
           <p:sp>
             <p:nvSpPr>
               <p:cNvPr id="144" name="文字方塊 143">
@@ -9576,7 +9576,7 @@
             </p:txBody>
           </p:sp>
         </mc:Choice>
-        <mc:Fallback>
+        <mc:Fallback xmlns="">
           <p:sp>
             <p:nvSpPr>
               <p:cNvPr id="144" name="文字方塊 143">
@@ -9729,8 +9729,8 @@
           </a:p>
         </p:txBody>
       </p:sp>
-      <mc:AlternateContent xmlns:mc="http://schemas.openxmlformats.org/markup-compatibility/2006">
-        <mc:Choice xmlns:a14="http://schemas.microsoft.com/office/drawing/2010/main" Requires="a14">
+      <mc:AlternateContent xmlns:mc="http://schemas.openxmlformats.org/markup-compatibility/2006" xmlns:a14="http://schemas.microsoft.com/office/drawing/2010/main">
+        <mc:Choice Requires="a14">
           <p:sp>
             <p:nvSpPr>
               <p:cNvPr id="146" name="文字方塊 145">
@@ -9888,7 +9888,7 @@
             </p:txBody>
           </p:sp>
         </mc:Choice>
-        <mc:Fallback>
+        <mc:Fallback xmlns="">
           <p:sp>
             <p:nvSpPr>
               <p:cNvPr id="146" name="文字方塊 145">
@@ -10028,8 +10028,8 @@
           </a:p>
         </p:txBody>
       </p:sp>
-      <mc:AlternateContent xmlns:mc="http://schemas.openxmlformats.org/markup-compatibility/2006">
-        <mc:Choice xmlns:a14="http://schemas.microsoft.com/office/drawing/2010/main" Requires="a14">
+      <mc:AlternateContent xmlns:mc="http://schemas.openxmlformats.org/markup-compatibility/2006" xmlns:a14="http://schemas.microsoft.com/office/drawing/2010/main">
+        <mc:Choice Requires="a14">
           <p:sp>
             <p:nvSpPr>
               <p:cNvPr id="148" name="文字方塊 147">
@@ -10058,6 +10058,7 @@
               </a:bodyPr>
               <a:lstStyle/>
               <a:p>
+                <a:pPr/>
                 <a14:m>
                   <m:oMathPara xmlns:m="http://schemas.openxmlformats.org/officeDocument/2006/math">
                     <m:oMathParaPr>
@@ -10181,7 +10182,7 @@
             </p:txBody>
           </p:sp>
         </mc:Choice>
-        <mc:Fallback>
+        <mc:Fallback xmlns="">
           <p:sp>
             <p:nvSpPr>
               <p:cNvPr id="148" name="文字方塊 147">
@@ -10321,8 +10322,8 @@
           </a:p>
         </p:txBody>
       </p:sp>
-      <mc:AlternateContent xmlns:mc="http://schemas.openxmlformats.org/markup-compatibility/2006">
-        <mc:Choice xmlns:a14="http://schemas.microsoft.com/office/drawing/2010/main" Requires="a14">
+      <mc:AlternateContent xmlns:mc="http://schemas.openxmlformats.org/markup-compatibility/2006" xmlns:a14="http://schemas.microsoft.com/office/drawing/2010/main">
+        <mc:Choice Requires="a14">
           <p:sp>
             <p:nvSpPr>
               <p:cNvPr id="150" name="文字方塊 149">
@@ -10429,7 +10430,7 @@
             </p:txBody>
           </p:sp>
         </mc:Choice>
-        <mc:Fallback>
+        <mc:Fallback xmlns="">
           <p:sp>
             <p:nvSpPr>
               <p:cNvPr id="150" name="文字方塊 149">
@@ -10526,8 +10527,8 @@
           </a:p>
         </p:txBody>
       </p:sp>
-      <mc:AlternateContent xmlns:mc="http://schemas.openxmlformats.org/markup-compatibility/2006">
-        <mc:Choice xmlns:a14="http://schemas.microsoft.com/office/drawing/2010/main" Requires="a14">
+      <mc:AlternateContent xmlns:mc="http://schemas.openxmlformats.org/markup-compatibility/2006" xmlns:a14="http://schemas.microsoft.com/office/drawing/2010/main">
+        <mc:Choice Requires="a14">
           <p:sp>
             <p:nvSpPr>
               <p:cNvPr id="152" name="文字方塊 151">
@@ -10628,7 +10629,7 @@
             </p:txBody>
           </p:sp>
         </mc:Choice>
-        <mc:Fallback>
+        <mc:Fallback xmlns="">
           <p:sp>
             <p:nvSpPr>
               <p:cNvPr id="152" name="文字方塊 151">
@@ -11862,11 +11863,17 @@
           <p:cNvGraphicFramePr>
             <a:graphicFrameLocks noGrp="1"/>
           </p:cNvGraphicFramePr>
-          <p:nvPr/>
+          <p:nvPr>
+            <p:extLst>
+              <p:ext uri="{D42A27DB-BD31-4B8C-83A1-F6EECF244321}">
+                <p14:modId xmlns:p14="http://schemas.microsoft.com/office/powerpoint/2010/main" val="490034450"/>
+              </p:ext>
+            </p:extLst>
+          </p:nvPr>
         </p:nvGraphicFramePr>
         <p:xfrm>
           <a:off x="548640" y="1371600"/>
-          <a:ext cx="7772400" cy="2743200"/>
+          <a:ext cx="7772400" cy="3474720"/>
         </p:xfrm>
         <a:graphic>
           <a:graphicData uri="http://schemas.openxmlformats.org/drawingml/2006/table">
@@ -12092,7 +12099,24 @@
                     <a:lstStyle/>
                     <a:p>
                       <a:r>
-                        <a:t>Claude-3.5 Sonnet (教師)</a:t>
+                        <a:rPr dirty="0"/>
+                        <a:t>Claude-</a:t>
+                      </a:r>
+                      <a:r>
+                        <a:rPr lang="en-US" dirty="0"/>
+                        <a:t>4</a:t>
+                      </a:r>
+                      <a:r>
+                        <a:rPr dirty="0"/>
+                        <a:t>.5 Sonnet (</a:t>
+                      </a:r>
+                      <a:r>
+                        <a:rPr dirty="0" err="1"/>
+                        <a:t>教師</a:t>
+                      </a:r>
+                      <a:r>
+                        <a:rPr dirty="0"/>
+                        <a:t>)</a:t>
                       </a:r>
                     </a:p>
                   </a:txBody>
@@ -12417,6 +12441,7 @@
                     <a:lstStyle/>
                     <a:p>
                       <a:r>
+                        <a:rPr dirty="0"/>
                         <a:t>0.78</a:t>
                       </a:r>
                     </a:p>
@@ -12546,7 +12571,7 @@
         </p:nvSpPr>
         <p:spPr>
           <a:xfrm>
-            <a:off x="548640" y="4297680"/>
+            <a:off x="502920" y="5074920"/>
             <a:ext cx="11064240" cy="1645920"/>
           </a:xfrm>
           <a:prstGeom prst="rect">
@@ -12561,43 +12586,163 @@
           <a:lstStyle/>
           <a:p>
             <a:r>
-              <a:rPr lang="en-US"/>
-              <a:t>註：§5.4 完整表格亦包含 Engagingness (UniEval)；本投影片因空間限制省略。</a:t>
-            </a:r>
-          </a:p>
-          <a:p>
-            <a:r>
-              <a:rPr sz="1400">
-                <a:latin typeface="Times New Roman"/>
-              </a:rPr>
-              <a:t>為何預期 SimLens 在 persona 特化維度上超越 Claude：</a:t>
+              <a:rPr lang="en-US" dirty="0"/>
+              <a:t>註：§5.4 </a:t>
+            </a:r>
+            <a:r>
+              <a:rPr lang="en-US" dirty="0" err="1"/>
+              <a:t>完整表格亦包含</a:t>
+            </a:r>
+            <a:r>
+              <a:rPr lang="en-US" dirty="0"/>
+              <a:t> Engagingness (</a:t>
+            </a:r>
+            <a:r>
+              <a:rPr lang="en-US" dirty="0" err="1"/>
+              <a:t>UniEval</a:t>
+            </a:r>
+            <a:r>
+              <a:rPr lang="en-US" dirty="0"/>
+              <a:t>)；</a:t>
+            </a:r>
+            <a:r>
+              <a:rPr lang="en-US" dirty="0" err="1"/>
+              <a:t>本投影片因空間限制省略</a:t>
+            </a:r>
+            <a:r>
+              <a:rPr lang="en-US" dirty="0"/>
+              <a:t>。</a:t>
+            </a:r>
+          </a:p>
+          <a:p>
+            <a:r>
+              <a:rPr sz="1400" dirty="0" err="1">
+                <a:latin typeface="Times New Roman"/>
+              </a:rPr>
+              <a:t>為何預期</a:t>
+            </a:r>
+            <a:r>
+              <a:rPr sz="1400" dirty="0">
+                <a:latin typeface="Times New Roman"/>
+              </a:rPr>
+              <a:t> SimLens 在 persona </a:t>
+            </a:r>
+            <a:r>
+              <a:rPr sz="1400" dirty="0" err="1">
+                <a:latin typeface="Times New Roman"/>
+              </a:rPr>
+              <a:t>特化維度上超越</a:t>
+            </a:r>
+            <a:r>
+              <a:rPr sz="1400" dirty="0">
+                <a:latin typeface="Times New Roman"/>
+              </a:rPr>
+              <a:t> Claude：</a:t>
             </a:r>
           </a:p>
           <a:p>
             <a:pPr lvl="1"/>
             <a:r>
-              <a:rPr sz="1400">
-                <a:latin typeface="Times New Roman"/>
-              </a:rPr>
-              <a:t>Per-persona LoRA adapter 的專精度超越通用教師模型可表達的程度。</a:t>
+              <a:rPr sz="1400" dirty="0">
+                <a:latin typeface="Times New Roman"/>
+              </a:rPr>
+              <a:t>Per-persona </a:t>
+            </a:r>
+            <a:r>
+              <a:rPr sz="1400" dirty="0" err="1">
+                <a:latin typeface="Times New Roman"/>
+              </a:rPr>
+              <a:t>LoRA</a:t>
+            </a:r>
+            <a:r>
+              <a:rPr sz="1400" dirty="0">
+                <a:latin typeface="Times New Roman"/>
+              </a:rPr>
+              <a:t> adapter </a:t>
+            </a:r>
+            <a:r>
+              <a:rPr sz="1400" dirty="0" err="1">
+                <a:latin typeface="Times New Roman"/>
+              </a:rPr>
+              <a:t>的專精度超越通用教師模型可表達的程度</a:t>
+            </a:r>
+            <a:r>
+              <a:rPr sz="1400" dirty="0">
+                <a:latin typeface="Times New Roman"/>
+              </a:rPr>
+              <a:t>。</a:t>
             </a:r>
           </a:p>
           <a:p>
             <a:pPr lvl="1"/>
             <a:r>
-              <a:rPr sz="1400">
-                <a:latin typeface="Times New Roman"/>
-              </a:rPr>
-              <a:t>RLAIF DPO 配合領域特化 reward 直接最佳化 Persona Consistency 與 Linguistic Habits。</a:t>
+              <a:rPr sz="1400" dirty="0">
+                <a:latin typeface="Times New Roman"/>
+              </a:rPr>
+              <a:t>RLAIF DPO </a:t>
+            </a:r>
+            <a:r>
+              <a:rPr sz="1400" dirty="0" err="1">
+                <a:latin typeface="Times New Roman"/>
+              </a:rPr>
+              <a:t>配合領域特化</a:t>
+            </a:r>
+            <a:r>
+              <a:rPr sz="1400" dirty="0">
+                <a:latin typeface="Times New Roman"/>
+              </a:rPr>
+              <a:t> reward </a:t>
+            </a:r>
+            <a:r>
+              <a:rPr sz="1400" dirty="0" err="1">
+                <a:latin typeface="Times New Roman"/>
+              </a:rPr>
+              <a:t>直接最佳化</a:t>
+            </a:r>
+            <a:r>
+              <a:rPr sz="1400" dirty="0">
+                <a:latin typeface="Times New Roman"/>
+              </a:rPr>
+              <a:t> Persona Consistency 與 Linguistic Habits。</a:t>
             </a:r>
           </a:p>
           <a:p>
             <a:pPr lvl="1"/>
             <a:r>
-              <a:rPr sz="1400">
-                <a:latin typeface="Times New Roman"/>
-              </a:rPr>
-              <a:t>空陣列棄答隱式編碼「無反應」，無需顯式 None 標籤。</a:t>
+              <a:rPr sz="1400" dirty="0" err="1">
+                <a:latin typeface="Times New Roman"/>
+              </a:rPr>
+              <a:t>空陣列棄答隱式編碼「無反應</a:t>
+            </a:r>
+            <a:r>
+              <a:rPr sz="1400" dirty="0">
+                <a:latin typeface="Times New Roman"/>
+              </a:rPr>
+              <a:t>」，</a:t>
+            </a:r>
+            <a:r>
+              <a:rPr sz="1400" dirty="0" err="1">
+                <a:latin typeface="Times New Roman"/>
+              </a:rPr>
+              <a:t>無需顯式</a:t>
+            </a:r>
+            <a:r>
+              <a:rPr sz="1400" dirty="0">
+                <a:latin typeface="Times New Roman"/>
+              </a:rPr>
+              <a:t> None </a:t>
+            </a:r>
+            <a:r>
+              <a:rPr sz="1400" dirty="0" err="1">
+                <a:latin typeface="Times New Roman"/>
+              </a:rPr>
+              <a:t>標籤</a:t>
+            </a:r>
+            <a:r>
+              <a:rPr sz="1400" dirty="0">
+                <a:latin typeface="Times New Roman"/>
+              </a:rPr>
+              <a:t>。</a:t>
             </a:r>
           </a:p>
         </p:txBody>
